--- a/docs/06_중간발표_PPT_간결판.pptx
+++ b/docs/06_중간발표_PPT_간결판.pptx
@@ -125,31 +125,31 @@
   <p:extLst>
     <p:ext uri="{521415D9-36F7-43E2-AB2F-B90AF26B5E84}">
       <p14:sectionLst xmlns:p14="http://schemas.microsoft.com/office/powerpoint/2010/main">
-        <p14:section name="① 표지·팀 소개" id="{0d91fc18-b1be-e8ec-f8e5-dd6f2173907c}">
+        <p14:section name="① 표지·팀 소개" id="{21ad9bde-67dc-c84f-712d-954aa83ad887}">
           <p14:sldIdLst>
             <p14:sldId id="256"/>
             <p14:sldId id="257"/>
           </p14:sldIdLst>
         </p14:section>
-        <p14:section name="② 문제 정의" id="{ead0a6e5-28fd-e2f8-83e3-32bc7222c07c}">
+        <p14:section name="② 문제 정의" id="{282a144e-a4cc-b381-05b3-97e21c9f4578}">
           <p14:sldIdLst>
             <p14:sldId id="258"/>
             <p14:sldId id="259"/>
           </p14:sldIdLst>
         </p14:section>
-        <p14:section name="③ 솔루션·핵심 가치" id="{5ec2c792-19d4-ace5-1853-919ce440ac2e}">
+        <p14:section name="③ 솔루션·핵심 가치" id="{ba4f3aab-6a56-86ca-86e3-dff55a8ce300}">
           <p14:sldIdLst>
             <p14:sldId id="260"/>
             <p14:sldId id="261"/>
           </p14:sldIdLst>
         </p14:section>
-        <p14:section name="④ SW 기술 아키텍처" id="{da37a9ce-b8e2-0bdb-0a55-525586afd4a5}">
+        <p14:section name="④ SW 기술 아키텍처" id="{91e82b29-fc5d-972c-4de8-440988b5601b}">
           <p14:sldIdLst>
             <p14:sldId id="262"/>
             <p14:sldId id="263"/>
           </p14:sldIdLst>
         </p14:section>
-        <p14:section name="⑤ 개발 현황·MVP 시연" id="{784b3026-03e0-105e-eb98-646bbe44688e}">
+        <p14:section name="⑤ 개발 현황·MVP 시연" id="{4739d216-7454-f674-0d3b-c339a357b246}">
           <p14:sldIdLst>
             <p14:sldId id="264"/>
             <p14:sldId id="265"/>
@@ -157,19 +157,19 @@
             <p14:sldId id="267"/>
           </p14:sldIdLst>
         </p14:section>
-        <p14:section name="⑥ 시장 분석·비즈니스 모델" id="{1d2f44b3-cee4-b00c-51a2-c70792b4c09a}">
+        <p14:section name="⑥ 시장 분석·비즈니스 모델" id="{2dd54059-46bb-15e6-a6f0-b1d385058050}">
           <p14:sldIdLst>
             <p14:sldId id="268"/>
             <p14:sldId id="269"/>
             <p14:sldId id="270"/>
           </p14:sldIdLst>
         </p14:section>
-        <p14:section name="⑦ 초기 시장 검증" id="{9502d196-6f92-5195-0a8a-189501def2d6}">
+        <p14:section name="⑦ 초기 시장 검증" id="{1d16dde2-1f27-5980-77d1-b12398102a91}">
           <p14:sldIdLst>
             <p14:sldId id="271"/>
           </p14:sldIdLst>
         </p14:section>
-        <p14:section name="⑧ 향후 계획·팀 역량" id="{37845fed-ac85-323b-7e1c-e58e5beec592}">
+        <p14:section name="⑧ 향후 계획·팀 역량" id="{5299a2eb-5f65-ab03-8791-11fa610030a6}">
           <p14:sldIdLst>
             <p14:sldId id="272"/>
             <p14:sldId id="273"/>
@@ -2278,7 +2278,7 @@
           <a:p>
             <a:r>
               <a:rPr lang="en-US" dirty="0"/>
-              <a:t>다음은 기술 스택입니다. 표를 한 문장으로 줄이면, 앱은 폰 안에서 돌아가고 서버는 꼭 필요한 곳에만 쓴다는 겁니다. 앱은 React와 Vite로 만든 웹앱이라 앱스토어 없이 링크로 바로 설치하고, 홈 화면에 추가하면 인터넷이 없어도 열립니다. 서버는 따로 두지 않았고, Supabase는 확인 번호 등록과 설문 수집에만 씁니다. 이렇게 한 이유는 개인정보와 비용 때문입니다.</a:t>
+              <a:t>다음은 기술 스택입니다. 표를 한 문장으로 줄이면, 앱은 폰 안에서 돌아가고 서버는 꼭 필요한 곳에만 쓴다는 겁니다. 앱은 React와 Vite로 만든 웹앱이라 앱스토어 없이 링크로 바로 설치하고, 홈 화면에 추가하면 인터넷이 없어도 열립니다. 저희가 직접 운영하는 서버는 없고, 외부 서비스인 Supabase를 확인 번호 등록과 설문 수집에만 씁니다. 이렇게 한 이유는 개인정보와 비용 때문입니다.</a:t>
             </a:r>
             <a:endParaRPr lang="en-US" dirty="0"/>
           </a:p>

--- a/docs/06_중간발표_PPT_간결판.pptx
+++ b/docs/06_중간발표_PPT_간결판.pptx
@@ -125,31 +125,31 @@
   <p:extLst>
     <p:ext uri="{521415D9-36F7-43E2-AB2F-B90AF26B5E84}">
       <p14:sectionLst xmlns:p14="http://schemas.microsoft.com/office/powerpoint/2010/main">
-        <p14:section name="① 표지·팀 소개" id="{21ad9bde-67dc-c84f-712d-954aa83ad887}">
+        <p14:section name="① 표지·팀 소개" id="{f205ce9d-2588-b7e9-a91f-932e16a812b2}">
           <p14:sldIdLst>
             <p14:sldId id="256"/>
             <p14:sldId id="257"/>
           </p14:sldIdLst>
         </p14:section>
-        <p14:section name="② 문제 정의" id="{282a144e-a4cc-b381-05b3-97e21c9f4578}">
+        <p14:section name="② 문제 정의" id="{f35851ff-ebc2-44f3-c903-fed07a97a8b3}">
           <p14:sldIdLst>
             <p14:sldId id="258"/>
             <p14:sldId id="259"/>
           </p14:sldIdLst>
         </p14:section>
-        <p14:section name="③ 솔루션·핵심 가치" id="{ba4f3aab-6a56-86ca-86e3-dff55a8ce300}">
+        <p14:section name="③ 솔루션·핵심 가치" id="{c51ab562-e917-9dbc-e861-e7ce80091a13}">
           <p14:sldIdLst>
             <p14:sldId id="260"/>
             <p14:sldId id="261"/>
           </p14:sldIdLst>
         </p14:section>
-        <p14:section name="④ SW 기술 아키텍처" id="{91e82b29-fc5d-972c-4de8-440988b5601b}">
+        <p14:section name="④ SW 기술 아키텍처" id="{926fd3c7-c69a-5bf9-e9a6-d32cad845bfa}">
           <p14:sldIdLst>
             <p14:sldId id="262"/>
             <p14:sldId id="263"/>
           </p14:sldIdLst>
         </p14:section>
-        <p14:section name="⑤ 개발 현황·MVP 시연" id="{4739d216-7454-f674-0d3b-c339a357b246}">
+        <p14:section name="⑤ 개발 현황·MVP 시연" id="{39b11ba8-66e5-1578-e180-46750c47841c}">
           <p14:sldIdLst>
             <p14:sldId id="264"/>
             <p14:sldId id="265"/>
@@ -157,19 +157,19 @@
             <p14:sldId id="267"/>
           </p14:sldIdLst>
         </p14:section>
-        <p14:section name="⑥ 시장 분석·비즈니스 모델" id="{2dd54059-46bb-15e6-a6f0-b1d385058050}">
+        <p14:section name="⑥ 시장 분석·비즈니스 모델" id="{c6e9cc4b-ab27-e2a8-5442-745b8cf4056e}">
           <p14:sldIdLst>
             <p14:sldId id="268"/>
             <p14:sldId id="269"/>
             <p14:sldId id="270"/>
           </p14:sldIdLst>
         </p14:section>
-        <p14:section name="⑦ 초기 시장 검증" id="{1d16dde2-1f27-5980-77d1-b12398102a91}">
+        <p14:section name="⑦ 초기 시장 검증" id="{31d64594-ca25-ba80-e84e-ca69a1667a5c}">
           <p14:sldIdLst>
             <p14:sldId id="271"/>
           </p14:sldIdLst>
         </p14:section>
-        <p14:section name="⑧ 향후 계획·팀 역량" id="{5299a2eb-5f65-ab03-8791-11fa610030a6}">
+        <p14:section name="⑧ 향후 계획·팀 역량" id="{21f9f4c4-1c13-58a0-6ecf-4709296e06d6}">
           <p14:sldIdLst>
             <p14:sldId id="272"/>
             <p14:sldId id="273"/>
@@ -1459,7 +1459,7 @@
           <a:p>
             <a:r>
               <a:rPr lang="en-US" dirty="0"/>
-              <a:t>안녕하세요, 검증 부분을 맡은 박명진입니다. 저희 가설은 근무 기록을 근거로 한 요청 문구가 있으면, 알바생이 사장님께 말을 꺼낼 수 있다고 느끼고 실제로 쓸 거라는 겁니다. 이 가설을 11월에 설문 30명과 인터뷰 5명으로, 표에 있는 다섯 가지를 확인하려고 합니다. 오른쪽 끝 칸은 10월 26일까지 받은 설문 13명의 중간 결과입니다. 매달 받은 금액을 넣겠다는 사람이 11명이었고, 게임 화면 광고가 싫다는 사람은 4명이었습니다. 다만 아직 지인 위주라 정식 조사라고 보기는 어렵고, 지금 알바 중인 사람이 2명뿐이라 주 15시간 기준은 판단을 미뤘습니다. 저희한테 불리한 결과도 있었습니다. 정산 요청 메시지와 기록 등록을 가장 쓸모 있는 기능으로 고른 사람은 한 명도 없었고, 미니게임은 안 쓸 것 같은 기능 1위였습니다. (멈춤) 정리하면, 비교 기능은 원했지만 요청 기능의 가치는 아직 못 느꼈습니다. 11월 인터뷰에서는 요청 문구와 확인 번호를 직접 보여 주고, 바로 이 부분을 확인하겠습니다.</a:t>
+              <a:t>안녕하세요, 검증 부분을 맡은 박명진입니다. 저희 가설은 근무 기록을 근거로 한 요청 문구가 있으면, 알바생이 사장님께 말을 꺼낼 수 있다고 느끼고 실제로 쓸 거라는 겁니다. 이 가설을 11월에 설문 30명과 인터뷰 5명으로, 표에 있는 다섯 가지를 확인하려고 합니다. 기준도 정해 뒀습니다. 예를 들어 인터뷰 5명 중 3명이 실제로 보내겠다고 하면 통과이고, 못 미치면 문구와 단계를 다시 짭니다. 자세한 기준은 보고서에 있습니다. 오른쪽 끝 칸은 10월 26일까지 받은 설문 13명의 중간 결과입니다. 매달 받은 금액을 넣겠다는 사람이 11명이었고, 게임 화면 광고가 싫다는 사람은 4명이었습니다. 다만 아직 지인 위주라 정식 조사라고 보기는 어렵고, 지금 알바 중인 사람이 2명뿐이라 주 15시간 기준은 판단을 미뤘습니다. 저희한테 불리한 결과도 있었습니다. 정산 요청 메시지와 기록 등록을 가장 쓸모 있는 기능으로 고른 사람은 한 명도 없었고, 미니게임은 안 쓸 것 같은 기능 1위였습니다. (멈춤) 정리하면, 비교 기능은 원했지만 요청 기능의 가치는 아직 못 느꼈습니다. 11월 인터뷰에서는 요청 문구와 확인 번호를 직접 보여 주고, 바로 이 부분을 확인하겠습니다.</a:t>
             </a:r>
             <a:endParaRPr lang="en-US" dirty="0"/>
           </a:p>

--- a/docs/06_중간발표_PPT_간결판.pptx
+++ b/docs/06_중간발표_PPT_간결판.pptx
@@ -125,31 +125,31 @@
   <p:extLst>
     <p:ext uri="{521415D9-36F7-43E2-AB2F-B90AF26B5E84}">
       <p14:sectionLst xmlns:p14="http://schemas.microsoft.com/office/powerpoint/2010/main">
-        <p14:section name="① 표지·팀 소개" id="{f205ce9d-2588-b7e9-a91f-932e16a812b2}">
+        <p14:section name="① 표지·팀 소개" id="{f8f10614-a158-a4c3-7062-f508589d367e}">
           <p14:sldIdLst>
             <p14:sldId id="256"/>
             <p14:sldId id="257"/>
           </p14:sldIdLst>
         </p14:section>
-        <p14:section name="② 문제 정의" id="{f35851ff-ebc2-44f3-c903-fed07a97a8b3}">
+        <p14:section name="② 문제 정의" id="{3e73563c-ba1d-2ffa-9bc8-dde6809d80e4}">
           <p14:sldIdLst>
             <p14:sldId id="258"/>
             <p14:sldId id="259"/>
           </p14:sldIdLst>
         </p14:section>
-        <p14:section name="③ 솔루션·핵심 가치" id="{c51ab562-e917-9dbc-e861-e7ce80091a13}">
+        <p14:section name="③ 솔루션·핵심 가치" id="{19936bba-4de2-02f6-e196-f55d81c22102}">
           <p14:sldIdLst>
             <p14:sldId id="260"/>
             <p14:sldId id="261"/>
           </p14:sldIdLst>
         </p14:section>
-        <p14:section name="④ SW 기술 아키텍처" id="{926fd3c7-c69a-5bf9-e9a6-d32cad845bfa}">
+        <p14:section name="④ SW 기술 아키텍처" id="{cac16083-c029-0b51-34bd-91db307ec12c}">
           <p14:sldIdLst>
             <p14:sldId id="262"/>
             <p14:sldId id="263"/>
           </p14:sldIdLst>
         </p14:section>
-        <p14:section name="⑤ 개발 현황·MVP 시연" id="{39b11ba8-66e5-1578-e180-46750c47841c}">
+        <p14:section name="⑤ 개발 현황·MVP 시연" id="{1bb4fa76-a9e7-237f-a7b2-709826cd1666}">
           <p14:sldIdLst>
             <p14:sldId id="264"/>
             <p14:sldId id="265"/>
@@ -157,19 +157,19 @@
             <p14:sldId id="267"/>
           </p14:sldIdLst>
         </p14:section>
-        <p14:section name="⑥ 시장 분석·비즈니스 모델" id="{c6e9cc4b-ab27-e2a8-5442-745b8cf4056e}">
+        <p14:section name="⑥ 시장 분석·비즈니스 모델" id="{4e8baca3-048b-065b-9eb1-50a6e070432e}">
           <p14:sldIdLst>
             <p14:sldId id="268"/>
             <p14:sldId id="269"/>
             <p14:sldId id="270"/>
           </p14:sldIdLst>
         </p14:section>
-        <p14:section name="⑦ 초기 시장 검증" id="{31d64594-ca25-ba80-e84e-ca69a1667a5c}">
+        <p14:section name="⑦ 초기 시장 검증" id="{5f21a7b1-0844-fa01-5013-971b2df1901b}">
           <p14:sldIdLst>
             <p14:sldId id="271"/>
           </p14:sldIdLst>
         </p14:section>
-        <p14:section name="⑧ 향후 계획·팀 역량" id="{21f9f4c4-1c13-58a0-6ecf-4709296e06d6}">
+        <p14:section name="⑧ 향후 계획·팀 역량" id="{1c181641-982e-d861-a4f4-fcaf785feaba}">
           <p14:sldIdLst>
             <p14:sldId id="272"/>
             <p14:sldId id="273"/>
@@ -1459,7 +1459,7 @@
           <a:p>
             <a:r>
               <a:rPr lang="en-US" dirty="0"/>
-              <a:t>안녕하세요, 검증 부분을 맡은 박명진입니다. 저희 가설은 근무 기록을 근거로 한 요청 문구가 있으면, 알바생이 사장님께 말을 꺼낼 수 있다고 느끼고 실제로 쓸 거라는 겁니다. 이 가설을 11월에 설문 30명과 인터뷰 5명으로, 표에 있는 다섯 가지를 확인하려고 합니다. 기준도 정해 뒀습니다. 예를 들어 인터뷰 5명 중 3명이 실제로 보내겠다고 하면 통과이고, 못 미치면 문구와 단계를 다시 짭니다. 자세한 기준은 보고서에 있습니다. 오른쪽 끝 칸은 10월 26일까지 받은 설문 13명의 중간 결과입니다. 매달 받은 금액을 넣겠다는 사람이 11명이었고, 게임 화면 광고가 싫다는 사람은 4명이었습니다. 다만 아직 지인 위주라 정식 조사라고 보기는 어렵고, 지금 알바 중인 사람이 2명뿐이라 주 15시간 기준은 판단을 미뤘습니다. 저희한테 불리한 결과도 있었습니다. 정산 요청 메시지와 기록 등록을 가장 쓸모 있는 기능으로 고른 사람은 한 명도 없었고, 미니게임은 안 쓸 것 같은 기능 1위였습니다. (멈춤) 정리하면, 비교 기능은 원했지만 요청 기능의 가치는 아직 못 느꼈습니다. 11월 인터뷰에서는 요청 문구와 확인 번호를 직접 보여 주고, 바로 이 부분을 확인하겠습니다.</a:t>
+              <a:t>안녕하세요, 검증 부분을 맡은 박명진입니다. 저희 가설은 이렇습니다. 근무 기록을 근거로 한 요청 문구가 있으면, 알바생이 사장님께 말을 꺼낼 수 있다고 느끼고 실제로 쓸 것이다. 이 가설을 11월에 설문 30명과 인터뷰 5명으로, 표에 있는 다섯 가지를 확인하려고 합니다. 기준도 정해 뒀습니다. 예를 들어 인터뷰 5명 중 3명이 실제로 보내겠다고 하면 통과이고, 못 미치면 문구와 단계를 다시 짭니다. 자세한 기준은 보고서에 있습니다. 오른쪽 끝 칸은 10월 26일까지 받은 설문 13명의 중간 결과입니다. 매달 받은 금액을 넣겠다는 사람이 11명이었고, 게임 화면 광고가 싫다는 사람은 4명이었습니다. 다만 아직 지인 위주라 정식 조사라고 보기는 어렵고, 지금 알바 중인 사람이 2명뿐이라 주 15시간 기준은 판단을 미뤘습니다. 저희한테 불리한 결과도 있었습니다. 정산 요청 메시지와 기록 등록을 가장 쓸모 있는 기능으로 고른 사람은 한 명도 없었고, 미니게임은 안 쓸 것 같은 기능 1위였습니다. (멈춤) 정리하면, 비교 기능은 원했지만 요청 기능의 가치는 아직 못 느꼈습니다. 11월 인터뷰에서는 요청 문구와 확인 번호를 직접 보여 주고, 바로 이 부분을 확인하겠습니다.</a:t>
             </a:r>
             <a:endParaRPr lang="en-US" dirty="0"/>
           </a:p>
@@ -1723,7 +1723,7 @@
           <a:p>
             <a:r>
               <a:rPr lang="en-US" dirty="0"/>
-              <a:t>팀장 마무리: (멈춤) 다시 한번 말씀드리면, 다른 앱은 '얼마 받아야 하나'에서 멈추지만, 알바가드는 '덜 받았으면 어떻게 받아내나'까지 갑니다. 처음에 보여 드린 금액처럼, 통장만 봐서는 보이지 않던 돈을 기록으로 찾아 주는 것, 그게 저희 알바가드입니다. 마지막으로 두 가지 조언을 구하고 싶습니다. 문서를 유료화하지 않고도 할 수 있는 수익 모델이 더 있을지, 그리고 설문 30명과 인터뷰 5명이면 검증하기에 충분할지입니다. 이상으로 4조 발표를 마치겠습니다. 들어 주셔서 감사합니다. 질문 받겠습니다.
+              <a:t>팀장 마무리: (멈춤) 다시 한번 말씀드리면, 다른 앱은 '얼마 받아야 하나'에서 멈추지만, 알바가드는 '덜 받았으면 어떻게 받아내나'까지 갑니다. 알바가드는 처음에 보여 드린 금액처럼, 통장만 봐서는 보이지 않던 돈을 기록으로 찾아 주는 앱입니다. 마지막으로 두 가지 조언을 구하고 싶습니다. 문서를 유료화하지 않고도 할 수 있는 수익 모델이 더 있을지, 그리고 설문 30명과 인터뷰 5명이면 검증하기에 충분할지입니다. 이상으로 4조 발표를 마치겠습니다. 들어 주셔서 감사합니다. 질문 받겠습니다.
 예상 질문 (이름 붙은 사람이 먼저 답하고, 모자라면 팀장이 보탭니다. 답은 짧은 메모이니 말할 때는 "~습니다"로)
 · [이지훈] 법적 효력 있나? → 보장하지 않는다. 판단은 감독관 · 법원. 우리는 판단할 자료를 정리하고, 수정 이력으로 무엇을 언제 왜 고쳤는지, 확인 번호로 그 번호가 언제 서버에 들어왔는지 보여 준다(내용과 맞춰 보는 방법은 기말까지). 통장 내역 · 카톡과 함께 내야 한다고 앱에도 적어 뒀다.
 · [이지훈] 서버는 여러분이 관리하는데 고치면 그만 아닌가? → 맞다. 공개키로는 넣기 · 읽기만 되고 시각은 서버가 찍는 것까지 확인했지만, 프로젝트 소유자 권한으로는 고칠 수 있다. 한계로 인정한다. 지금 막는 건 "사용자 본인이 나중에 고쳐 쓰기"까지. 운영자까지 못 고치게 하는 외부 공인 시점 확인은 비용 때문에 계획. 서버에는 번호만 있어서 운영자가 서버를 고쳐도 폰의 근무 내용 자체는 못 바꾼다. (확인 페이지에도 "앱에서 고치거나 지울 수 없음, 운영자 권한으로는 가능"이라고 적어 두었다)
@@ -1926,7 +1926,7 @@
           <a:p>
             <a:r>
               <a:rPr lang="en-US" dirty="0"/>
-              <a:t>저희가 주목한 문제는 세 가지입니다. 첫 번째는 얼마를 받아야 하는지 계산하기 어렵다는 겁니다. 노동절에 일한 알바생 중 33.2%는 수당을 받는지 안내를 못 받아서 모른다고 답했습니다. 두 번째는 덜 받아도 알아채기 어렵다는 겁니다. 알바생의 48.0%가 임금 문제를 겪었다고 했는데, 저희 설문에서도 12명 중 7명이 통장에 들어온 총액만 본다고 답했습니다. 세 번째는 알아도 말을 꺼내기 어렵다는 겁니다. 최저시급보다 덜 받은 사람 중 49.3%는 아무 대응도 하지 않았습니다. 기록이 없으면 "나중에 지어낸 거 아니냐"는 한마디에 할 말이 없어지기 때문입니다. 참고로 이 세 숫자는 모두 알바천국 설문 결과입니다. (멈춤) 결국 세 문제의 뿌리는 같습니다. 근거가 될 기록이 없다는 겁니다.</a:t>
+              <a:t>저희가 주목한 문제는 세 가지입니다. 화면의 숫자는 모두 알바천국 설문 결과인데요. 먼저, 얼마를 받아야 하는지부터 어렵습니다. 노동절에 일한 알바생 셋 중 한 명은 수당을 받는지조차 몰랐습니다. 다음은 덜 받아도 잘 모른다는 점입니다. 저희 설문에서도 12명 중 7명이 통장에 들어온 총액만 본다고 했습니다. 마지막으로, 알아도 말을 못 합니다. 최저시급보다 덜 받은 사람 중 절반 가까이가 아무 대응도 하지 않았습니다. 기록이 없으면 "나중에 지어낸 거 아니냐"는 한마디에 할 말이 없어지니까요. (멈춤) 결국 세 문제의 뿌리는 같습니다. 근거가 될 기록이 없다는 겁니다.</a:t>
             </a:r>
             <a:endParaRPr lang="en-US" dirty="0"/>
           </a:p>
@@ -2190,7 +2190,7 @@
           <a:p>
             <a:r>
               <a:rPr lang="en-US" dirty="0"/>
-              <a:t>저희 차별점은 세 가지입니다. 첫째, 사장님 가입 없이 혼자 쓸 수 있습니다. 둘째, 실제로 받은 돈과 비교해서 요청 문구와 증빙까지 이어집니다. 셋째, 기록할 때마다 확인 번호와 서버 등록 시각이 남습니다. 사유 없이는 기록을 고칠 수 없고, 지워도 흔적이 남고, 고치면 다시 등록됩니다. 이 부분은 다른 앱이 쉽게 따라 하기 어렵다고 생각합니다. (멈춤) 결국 다른 앱은 '얼마 받아야 하나'에서 멈추고, 알바가드는 '덜 받았으면 어떻게 받아내나'까지 갑니다. 물론 한계도 있습니다. 비교 기능 자체는 다른 앱도 충분히 따라올 수 있습니다. 그리고 이 기록이 법적 효력을 보장하지는 않습니다. 통장 내역이나 메시지와 같이 내야 힘이 생기고, 최종 판단은 근로감독관과 법원이 합니다.</a:t>
+              <a:t>저희 차별점은 세 가지입니다. 첫째, 사장님 가입 없이 혼자 쓸 수 있습니다. 둘째, 실제로 받은 돈과 비교해서 요청 문구와 증빙까지 이어집니다. 셋째, 기록할 때마다 확인 번호와 서버 등록 시각이 남습니다. 사유 없이는 기록을 고칠 수 없고, 지워도 흔적이 남고, 고치면 다시 등록됩니다. 이 부분은 다른 앱이 쉽게 따라 하기 어렵다고 생각합니다. (멈춤) 한마디로, 다른 앱은 '얼마 받아야 하나'에서 멈추고, 알바가드는 '덜 받았으면 어떻게 받아내나'까지 갑니다. 물론 한계도 있습니다. 비교 기능 자체는 다른 앱도 충분히 따라올 수 있습니다. 그리고 이 기록이 법적 효력을 보장하지는 않습니다. 통장 내역이나 메시지와 같이 내야 힘이 생기고, 최종 판단은 근로감독관과 법원이 합니다.</a:t>
             </a:r>
             <a:endParaRPr lang="en-US" dirty="0"/>
           </a:p>
@@ -2278,7 +2278,7 @@
           <a:p>
             <a:r>
               <a:rPr lang="en-US" dirty="0"/>
-              <a:t>다음은 기술 스택입니다. 표를 한 문장으로 줄이면, 앱은 폰 안에서 돌아가고 서버는 꼭 필요한 곳에만 쓴다는 겁니다. 앱은 React와 Vite로 만든 웹앱이라 앱스토어 없이 링크로 바로 설치하고, 홈 화면에 추가하면 인터넷이 없어도 열립니다. 저희가 직접 운영하는 서버는 없고, 외부 서비스인 Supabase를 확인 번호 등록과 설문 수집에만 씁니다. 이렇게 한 이유는 개인정보와 비용 때문입니다.</a:t>
+              <a:t>다음은 기술 스택입니다. 표에서 기억하실 건 하나입니다. 앱은 폰 안에서 돌아가고, 서버는 꼭 필요한 곳에만 씁니다. 앱은 React와 Vite로 만든 웹앱이라 앱스토어 없이 링크로 바로 설치하고, 홈 화면에 추가하면 인터넷이 없어도 열립니다. 저희가 직접 운영하는 서버는 없고, 외부 서비스인 Supabase를 확인 번호 등록과 설문 수집에만 씁니다. 이렇게 한 이유는 개인정보와 비용 때문입니다.</a:t>
             </a:r>
             <a:endParaRPr lang="en-US" dirty="0"/>
           </a:p>

--- a/docs/06_중간발표_PPT_간결판.pptx
+++ b/docs/06_중간발표_PPT_간결판.pptx
@@ -125,31 +125,31 @@
   <p:extLst>
     <p:ext uri="{521415D9-36F7-43E2-AB2F-B90AF26B5E84}">
       <p14:sectionLst xmlns:p14="http://schemas.microsoft.com/office/powerpoint/2010/main">
-        <p14:section name="① 표지·팀 소개" id="{f8f10614-a158-a4c3-7062-f508589d367e}">
+        <p14:section name="① 표지·팀 소개" id="{b2e4f21e-f068-551e-157c-0bf394d067cb}">
           <p14:sldIdLst>
             <p14:sldId id="256"/>
             <p14:sldId id="257"/>
           </p14:sldIdLst>
         </p14:section>
-        <p14:section name="② 문제 정의" id="{3e73563c-ba1d-2ffa-9bc8-dde6809d80e4}">
+        <p14:section name="② 문제 정의" id="{8b23a0cf-d72d-2e8a-b285-795b1b7a8f02}">
           <p14:sldIdLst>
             <p14:sldId id="258"/>
             <p14:sldId id="259"/>
           </p14:sldIdLst>
         </p14:section>
-        <p14:section name="③ 솔루션·핵심 가치" id="{19936bba-4de2-02f6-e196-f55d81c22102}">
+        <p14:section name="③ 솔루션·핵심 가치" id="{3348f7ba-12dd-a39d-55db-bc8c2359ec1e}">
           <p14:sldIdLst>
             <p14:sldId id="260"/>
             <p14:sldId id="261"/>
           </p14:sldIdLst>
         </p14:section>
-        <p14:section name="④ SW 기술 아키텍처" id="{cac16083-c029-0b51-34bd-91db307ec12c}">
+        <p14:section name="④ SW 기술 아키텍처" id="{3a9f4816-ab23-6e52-5f55-2d11d2a3ac80}">
           <p14:sldIdLst>
             <p14:sldId id="262"/>
             <p14:sldId id="263"/>
           </p14:sldIdLst>
         </p14:section>
-        <p14:section name="⑤ 개발 현황·MVP 시연" id="{1bb4fa76-a9e7-237f-a7b2-709826cd1666}">
+        <p14:section name="⑤ 개발 현황·MVP 시연" id="{56991052-4305-f16c-7fb5-772de7b7d6d8}">
           <p14:sldIdLst>
             <p14:sldId id="264"/>
             <p14:sldId id="265"/>
@@ -157,19 +157,19 @@
             <p14:sldId id="267"/>
           </p14:sldIdLst>
         </p14:section>
-        <p14:section name="⑥ 시장 분석·비즈니스 모델" id="{4e8baca3-048b-065b-9eb1-50a6e070432e}">
+        <p14:section name="⑥ 시장 분석·비즈니스 모델" id="{61e0fd52-9c0c-c070-1b40-c784a11cbaca}">
           <p14:sldIdLst>
             <p14:sldId id="268"/>
             <p14:sldId id="269"/>
             <p14:sldId id="270"/>
           </p14:sldIdLst>
         </p14:section>
-        <p14:section name="⑦ 초기 시장 검증" id="{5f21a7b1-0844-fa01-5013-971b2df1901b}">
+        <p14:section name="⑦ 초기 시장 검증" id="{e793c72b-a736-050f-af1a-8b065f7ea0bd}">
           <p14:sldIdLst>
             <p14:sldId id="271"/>
           </p14:sldIdLst>
         </p14:section>
-        <p14:section name="⑧ 향후 계획·팀 역량" id="{1c181641-982e-d861-a4f4-fcaf785feaba}">
+        <p14:section name="⑧ 향후 계획·팀 역량" id="{973e8efb-8366-22b5-f678-394ec461de1e}">
           <p14:sldIdLst>
             <p14:sldId id="272"/>
             <p14:sldId id="273"/>
@@ -1723,7 +1723,7 @@
           <a:p>
             <a:r>
               <a:rPr lang="en-US" dirty="0"/>
-              <a:t>팀장 마무리: (멈춤) 다시 한번 말씀드리면, 다른 앱은 '얼마 받아야 하나'에서 멈추지만, 알바가드는 '덜 받았으면 어떻게 받아내나'까지 갑니다. 알바가드는 처음에 보여 드린 금액처럼, 통장만 봐서는 보이지 않던 돈을 기록으로 찾아 주는 앱입니다. 마지막으로 두 가지 조언을 구하고 싶습니다. 문서를 유료화하지 않고도 할 수 있는 수익 모델이 더 있을지, 그리고 설문 30명과 인터뷰 5명이면 검증하기에 충분할지입니다. 이상으로 4조 발표를 마치겠습니다. 들어 주셔서 감사합니다. 질문 받겠습니다.
+              <a:t>팀장 마무리: (멈춤) 다시 한번 말씀드리면, 다른 앱은 '얼마 받아야 하나'에서 멈추지만, 알바가드는 '덜 받았으면 어떻게 받아내나'까지 갑니다. 처음에 보여 드린 금액처럼, 통장만 봐서는 보이지 않던 돈을 기록으로 찾아 주려고 만든 앱입니다. 마지막으로 두 가지 조언을 구하고 싶습니다. 문서를 유료화하지 않고도 할 수 있는 수익 모델이 더 있을지, 그리고 설문 30명과 인터뷰 5명이면 검증하기에 충분할지입니다. 이상으로 4조 발표를 마치겠습니다. 들어 주셔서 감사합니다. 질문 받겠습니다.
 예상 질문 (이름 붙은 사람이 먼저 답하고, 모자라면 팀장이 보탭니다. 답은 짧은 메모이니 말할 때는 "~습니다"로)
 · [이지훈] 법적 효력 있나? → 보장하지 않는다. 판단은 감독관 · 법원. 우리는 판단할 자료를 정리하고, 수정 이력으로 무엇을 언제 왜 고쳤는지, 확인 번호로 그 번호가 언제 서버에 들어왔는지 보여 준다(내용과 맞춰 보는 방법은 기말까지). 통장 내역 · 카톡과 함께 내야 한다고 앱에도 적어 뒀다.
 · [이지훈] 서버는 여러분이 관리하는데 고치면 그만 아닌가? → 맞다. 공개키로는 넣기 · 읽기만 되고 시각은 서버가 찍는 것까지 확인했지만, 프로젝트 소유자 권한으로는 고칠 수 있다. 한계로 인정한다. 지금 막는 건 "사용자 본인이 나중에 고쳐 쓰기"까지. 운영자까지 못 고치게 하는 외부 공인 시점 확인은 비용 때문에 계획. 서버에는 번호만 있어서 운영자가 서버를 고쳐도 폰의 근무 내용 자체는 못 바꾼다. (확인 페이지에도 "앱에서 고치거나 지울 수 없음, 운영자 권한으로는 가능"이라고 적어 두었다)

--- a/docs/06_중간발표_PPT_간결판.pptx
+++ b/docs/06_중간발표_PPT_간결판.pptx
@@ -125,31 +125,31 @@
   <p:extLst>
     <p:ext uri="{521415D9-36F7-43E2-AB2F-B90AF26B5E84}">
       <p14:sectionLst xmlns:p14="http://schemas.microsoft.com/office/powerpoint/2010/main">
-        <p14:section name="① 표지·팀 소개" id="{b2e4f21e-f068-551e-157c-0bf394d067cb}">
+        <p14:section name="① 표지·팀 소개" id="{3aa5269f-6375-55cb-c67b-c19ebf965c00}">
           <p14:sldIdLst>
             <p14:sldId id="256"/>
             <p14:sldId id="257"/>
           </p14:sldIdLst>
         </p14:section>
-        <p14:section name="② 문제 정의" id="{8b23a0cf-d72d-2e8a-b285-795b1b7a8f02}">
+        <p14:section name="② 문제 정의" id="{6438d1d2-6980-3646-a6ed-59ac92cd04b2}">
           <p14:sldIdLst>
             <p14:sldId id="258"/>
             <p14:sldId id="259"/>
           </p14:sldIdLst>
         </p14:section>
-        <p14:section name="③ 솔루션·핵심 가치" id="{3348f7ba-12dd-a39d-55db-bc8c2359ec1e}">
+        <p14:section name="③ 솔루션·핵심 가치" id="{5d168b44-bfd6-c379-d0ea-1623925eae94}">
           <p14:sldIdLst>
             <p14:sldId id="260"/>
             <p14:sldId id="261"/>
           </p14:sldIdLst>
         </p14:section>
-        <p14:section name="④ SW 기술 아키텍처" id="{3a9f4816-ab23-6e52-5f55-2d11d2a3ac80}">
+        <p14:section name="④ SW 기술 아키텍처" id="{da25b8df-b4b7-a4d5-6bfe-095e982fa545}">
           <p14:sldIdLst>
             <p14:sldId id="262"/>
             <p14:sldId id="263"/>
           </p14:sldIdLst>
         </p14:section>
-        <p14:section name="⑤ 개발 현황·MVP 시연" id="{56991052-4305-f16c-7fb5-772de7b7d6d8}">
+        <p14:section name="⑤ 개발 현황·MVP 시연" id="{06a55483-92d7-d7ca-8672-8cc3bee94ceb}">
           <p14:sldIdLst>
             <p14:sldId id="264"/>
             <p14:sldId id="265"/>
@@ -157,19 +157,19 @@
             <p14:sldId id="267"/>
           </p14:sldIdLst>
         </p14:section>
-        <p14:section name="⑥ 시장 분석·비즈니스 모델" id="{61e0fd52-9c0c-c070-1b40-c784a11cbaca}">
+        <p14:section name="⑥ 시장 분석·비즈니스 모델" id="{e1696eae-220e-3aeb-10e3-4411a236597a}">
           <p14:sldIdLst>
             <p14:sldId id="268"/>
             <p14:sldId id="269"/>
             <p14:sldId id="270"/>
           </p14:sldIdLst>
         </p14:section>
-        <p14:section name="⑦ 초기 시장 검증" id="{e793c72b-a736-050f-af1a-8b065f7ea0bd}">
+        <p14:section name="⑦ 초기 시장 검증" id="{2580cd9c-a0a4-8e24-a114-d97e22d9a34a}">
           <p14:sldIdLst>
             <p14:sldId id="271"/>
           </p14:sldIdLst>
         </p14:section>
-        <p14:section name="⑧ 향후 계획·팀 역량" id="{973e8efb-8366-22b5-f678-394ec461de1e}">
+        <p14:section name="⑧ 향후 계획·팀 역량" id="{cc2de17a-c9bd-20c3-547b-7a58e77ecc26}">
           <p14:sldIdLst>
             <p14:sldId id="272"/>
             <p14:sldId id="273"/>
@@ -838,7 +838,7 @@
           <a:p>
             <a:r>
               <a:rPr lang="en-US" dirty="0"/>
-              <a:t>안녕하세요, 4조 발표를 맡은 팀장 이지훈입니다. 저희가 만든 앱은 알바가드입니다. 화면에 보이는 금액은 저희 앱 예시 데이터에서 두 달 동안 덜 받은 알바비인데요. 통장에 들어온 총액만 봐서는 잘 안 보이는 돈입니다. 알바가드는 이렇게 놓치기 쉬운 돈을 근무 기록으로 찾아 주는 앱입니다. 알바비를 덜 받아도 모르거나, 알아도 말을 꺼내기 어려운 대학생을 위해 기록, 비교, 요청을 한 앱에 담았습니다.</a:t>
+              <a:t>안녕하세요, 4조 발표를 맡은 팀장 이지훈입니다. 혹시 지난달 알바비, 정확히 얼마를 받아야 했는지 아시나요? 저희가 만든 앱은 알바가드입니다. 화면에 보이는 금액은 저희 앱 예시 데이터에서 두 달 동안 덜 받은 알바비인데요. 통장에 들어온 총액만 봐서는 잘 안 보이는 돈입니다. 알바가드는 이렇게 놓치기 쉬운 돈을 근무 기록으로 찾아 주는 앱입니다. 알바비를 덜 받아도 모르거나, 알아도 말을 꺼내기 어려운 대학생을 위해 기록, 비교, 요청을 한 앱에 담았습니다.</a:t>
             </a:r>
             <a:endParaRPr lang="en-US" dirty="0"/>
           </a:p>
@@ -1107,7 +1107,7 @@
           <a:p>
             <a:r>
               <a:rPr lang="en-US" dirty="0"/>
-              <a:t>방금 보신 기능을 포함해서, 계획한 8개 기능은 모두 동작합니다. 그래도 100%라고 쓰지는 않았습니다. 오른쪽 동그라미 세 칸은 각각 컴퓨터에서 동작, 실제 폰에서 확인, 사용자 검증인데요. 지금은 첫 칸만 채워졌고, 나머지 두 칸은 11월에 할 일입니다. 그래서 완성도를 평균 80% 정도로 잡았습니다. 다음으로 시장과 수익 부분은 손유호 팀원이 이어서 발표하겠습니다.</a:t>
+              <a:t>방금 보신 기능을 포함해서, 계획한 8개 기능은 모두 동작합니다. 그래도 100%라고 쓰지는 않았습니다. 오른쪽 동그라미 세 칸은 각각 컴퓨터에서 동작, 실제 폰에서 확인, 사용자 검증인데요. 지금은 첫 칸만 채워졌고, 나머지 두 칸은 11월에 할 일입니다. 그래서 완성도를 평균 80% 정도로 잡았습니다. 지금까지 문제와 해결 방법, 그리고 실제로 동작하는 모습을 보셨습니다. 다음으로 시장과 수익 부분은 손유호 팀원이 이어서 발표하겠습니다.</a:t>
             </a:r>
             <a:endParaRPr lang="en-US" dirty="0"/>
           </a:p>
@@ -1838,7 +1838,7 @@
           <a:p>
             <a:r>
               <a:rPr lang="en-US" dirty="0"/>
-              <a:t>먼저 지금 상태부터 말씀드리겠습니다. 계획했던 기능 8개는 모두 동작하는 상태로 배포까지 했고, 완성도는 평균 80% 정도로 보고 있습니다. 설문은 지금까지 13명이 답해 줬고, 앱을 직접 써 보게 하는 인터뷰는 11월에 진행할 예정입니다. 오른쪽 QR을 찍으시면 앱과 설문을 바로 열 수 있습니다. 설문은 이름 없이 3분이면 끝나니까, 발표가 끝나고 한번 답해 주시면 정말 감사하겠습니다. 발표는 저와 손유호, 박명진 세 명이 나눠서 진행하겠습니다.</a:t>
+              <a:t>먼저 지금 상태부터 말씀드리겠습니다. 계획했던 기능 8개는 모두 동작하는 상태로 배포까지 했고, 완성도는 평균 80% 정도로 보고 있습니다. 설문은 지금까지 13명이 답해 줬고, 앱을 직접 써 보게 하는 인터뷰는 11월에 진행할 예정입니다. 오른쪽 QR을 찍으시면 앱과 설문을 바로 열 수 있습니다. 설문은 이름 없이 3분이면 끝나니까, 발표가 끝나고 한번 답해 주시면 정말 감사하겠습니다. 오늘은 문제, 해결 방법, 기술과 시연, 시장과 수익, 검증과 일정 순서로 말씀드리겠습니다. 발표는 저와 손유호, 박명진 세 명이 나눠서 진행하겠습니다.</a:t>
             </a:r>
             <a:endParaRPr lang="en-US" dirty="0"/>
           </a:p>
